--- a/docs/presentation/Municipal-Law-Skill.pptx
+++ b/docs/presentation/Municipal-Law-Skill.pptx
@@ -3429,7 +3429,7 @@
                 </a:solidFill>
                 <a:latin typeface="Segoe UI"/>
               </a:rPr>
-              <a:t>✗  May hallucinate</a:t>
+              <a:t>✗  May be incomplete</a:t>
             </a:r>
           </a:p>
           <a:p>
@@ -3461,7 +3461,7 @@
                 </a:solidFill>
                 <a:latin typeface="Segoe UI"/>
               </a:rPr>
-              <a:t>✗  No provenance</a:t>
+              <a:t>✗  Cannot prove provenance</a:t>
             </a:r>
           </a:p>
         </p:txBody>
@@ -4214,7 +4214,7 @@
           <a:lstStyle/>
           <a:p>
             <a:r>
-              <a:rPr sz="1300" b="0" i="1">
+              <a:rPr sz="1000" b="0" i="1">
                 <a:solidFill>
                   <a:srgbClr val="9AA4B2"/>
                 </a:solidFill>
@@ -4399,13 +4399,48 @@
       </p:sp>
       <p:sp>
         <p:nvSpPr>
-          <p:cNvPr id="4" name="Rectangle 3"/>
+          <p:cNvPr id="4" name="TextBox 3"/>
+          <p:cNvSpPr txBox="1"/>
+          <p:nvPr/>
+        </p:nvSpPr>
+        <p:spPr>
+          <a:xfrm>
+            <a:off x="914400" y="1600200"/>
+            <a:ext cx="10332720" cy="548640"/>
+          </a:xfrm>
+          <a:prstGeom prst="rect">
+            <a:avLst/>
+          </a:prstGeom>
+          <a:noFill/>
+        </p:spPr>
+        <p:txBody>
+          <a:bodyPr wrap="square" anchor="t">
+            <a:spAutoFit/>
+          </a:bodyPr>
+          <a:lstStyle/>
+          <a:p>
+            <a:pPr algn="ctr"/>
+            <a:r>
+              <a:rPr sz="2000" b="1" i="0">
+                <a:solidFill>
+                  <a:srgbClr val="7EE0C3"/>
+                </a:solidFill>
+                <a:latin typeface="Segoe UI"/>
+              </a:rPr>
+              <a:t>Every response is cryptographically signed (Ed25519).</a:t>
+            </a:r>
+          </a:p>
+        </p:txBody>
+      </p:sp>
+      <p:sp>
+        <p:nvSpPr>
+          <p:cNvPr id="5" name="Rectangle 4"/>
           <p:cNvSpPr/>
           <p:nvPr/>
         </p:nvSpPr>
         <p:spPr>
           <a:xfrm>
-            <a:off x="914400" y="2377440"/>
+            <a:off x="914400" y="2651760"/>
             <a:ext cx="2118207" cy="1005840"/>
           </a:xfrm>
           <a:prstGeom prst="rect">
@@ -4453,13 +4488,13 @@
       </p:sp>
       <p:sp>
         <p:nvSpPr>
-          <p:cNvPr id="5" name="TextBox 4"/>
+          <p:cNvPr id="6" name="TextBox 5"/>
           <p:cNvSpPr txBox="1"/>
           <p:nvPr/>
         </p:nvSpPr>
         <p:spPr>
           <a:xfrm>
-            <a:off x="3032607" y="2606040"/>
+            <a:off x="3032607" y="2880360"/>
             <a:ext cx="464972" cy="548640"/>
           </a:xfrm>
           <a:prstGeom prst="rect">
@@ -4488,13 +4523,13 @@
       </p:sp>
       <p:sp>
         <p:nvSpPr>
-          <p:cNvPr id="6" name="Rectangle 5"/>
+          <p:cNvPr id="7" name="Rectangle 6"/>
           <p:cNvSpPr/>
           <p:nvPr/>
         </p:nvSpPr>
         <p:spPr>
           <a:xfrm>
-            <a:off x="3497579" y="2377440"/>
+            <a:off x="3497579" y="2651760"/>
             <a:ext cx="2118207" cy="1005840"/>
           </a:xfrm>
           <a:prstGeom prst="rect">
@@ -4542,13 +4577,13 @@
       </p:sp>
       <p:sp>
         <p:nvSpPr>
-          <p:cNvPr id="7" name="TextBox 6"/>
+          <p:cNvPr id="8" name="TextBox 7"/>
           <p:cNvSpPr txBox="1"/>
           <p:nvPr/>
         </p:nvSpPr>
         <p:spPr>
           <a:xfrm>
-            <a:off x="5615786" y="2606040"/>
+            <a:off x="5615786" y="2880360"/>
             <a:ext cx="464972" cy="548640"/>
           </a:xfrm>
           <a:prstGeom prst="rect">
@@ -4577,13 +4612,13 @@
       </p:sp>
       <p:sp>
         <p:nvSpPr>
-          <p:cNvPr id="8" name="Rectangle 7"/>
+          <p:cNvPr id="9" name="Rectangle 8"/>
           <p:cNvSpPr/>
           <p:nvPr/>
         </p:nvSpPr>
         <p:spPr>
           <a:xfrm>
-            <a:off x="6080758" y="2377440"/>
+            <a:off x="6080758" y="2651760"/>
             <a:ext cx="2118207" cy="1005840"/>
           </a:xfrm>
           <a:prstGeom prst="rect">
@@ -4631,13 +4666,13 @@
       </p:sp>
       <p:sp>
         <p:nvSpPr>
-          <p:cNvPr id="9" name="TextBox 8"/>
+          <p:cNvPr id="10" name="TextBox 9"/>
           <p:cNvSpPr txBox="1"/>
           <p:nvPr/>
         </p:nvSpPr>
         <p:spPr>
           <a:xfrm>
-            <a:off x="8198965" y="2606040"/>
+            <a:off x="8198965" y="2880360"/>
             <a:ext cx="464972" cy="548640"/>
           </a:xfrm>
           <a:prstGeom prst="rect">
@@ -4666,13 +4701,13 @@
       </p:sp>
       <p:sp>
         <p:nvSpPr>
-          <p:cNvPr id="10" name="Rectangle 9"/>
+          <p:cNvPr id="11" name="Rectangle 10"/>
           <p:cNvSpPr/>
           <p:nvPr/>
         </p:nvSpPr>
         <p:spPr>
           <a:xfrm>
-            <a:off x="8663937" y="2377440"/>
+            <a:off x="8663937" y="2651760"/>
             <a:ext cx="2118207" cy="1005840"/>
           </a:xfrm>
           <a:prstGeom prst="rect">
@@ -4720,13 +4755,13 @@
       </p:sp>
       <p:sp>
         <p:nvSpPr>
-          <p:cNvPr id="11" name="TextBox 10"/>
+          <p:cNvPr id="12" name="TextBox 11"/>
           <p:cNvSpPr txBox="1"/>
           <p:nvPr/>
         </p:nvSpPr>
         <p:spPr>
           <a:xfrm>
-            <a:off x="914400" y="3931920"/>
+            <a:off x="914400" y="4206240"/>
             <a:ext cx="10332720" cy="1097280"/>
           </a:xfrm>
           <a:prstGeom prst="rect">
@@ -4748,14 +4783,14 @@
                 </a:solidFill>
                 <a:latin typeface="Segoe UI"/>
               </a:rPr>
-              <a:t>Every /is_action_allowed and /search response is Ed25519-signed — /pubkey lets any downstream agent verify offline that this service, not a relay or a cache, produced a citation. /version reports corpus freshness, so callers know exactly how stale the law is.</a:t>
-            </a:r>
-          </a:p>
-        </p:txBody>
-      </p:sp>
-      <p:sp>
-        <p:nvSpPr>
-          <p:cNvPr id="12" name="TextBox 11"/>
+              <a:t>/pubkey lets any downstream agent verify offline that this service, not a relay or a cache, produced a citation. /version reports corpus freshness, so callers know exactly how stale the law is.</a:t>
+            </a:r>
+          </a:p>
+        </p:txBody>
+      </p:sp>
+      <p:sp>
+        <p:nvSpPr>
+          <p:cNvPr id="13" name="TextBox 12"/>
           <p:cNvSpPr txBox="1"/>
           <p:nvPr/>
         </p:nvSpPr>
@@ -4789,7 +4824,7 @@
       </p:sp>
       <p:sp>
         <p:nvSpPr>
-          <p:cNvPr id="13" name="TextBox 12"/>
+          <p:cNvPr id="14" name="TextBox 13"/>
           <p:cNvSpPr txBox="1"/>
           <p:nvPr/>
         </p:nvSpPr>
@@ -4934,7 +4969,7 @@
         <p:spPr>
           <a:xfrm>
             <a:off x="914400" y="1737360"/>
-            <a:ext cx="10332720" cy="1463040"/>
+            <a:ext cx="10332720" cy="1280160"/>
           </a:xfrm>
           <a:prstGeom prst="rect">
             <a:avLst/>
@@ -4968,7 +5003,7 @@
           <a:p>
             <a:pPr algn="ctr"/>
             <a:r>
-              <a:rPr sz="2000" b="1" i="1">
+              <a:rPr sz="1800" b="1" i="1">
                 <a:solidFill>
                   <a:srgbClr val="7EE0C3"/>
                 </a:solidFill>
@@ -4987,7 +5022,7 @@
         </p:nvSpPr>
         <p:spPr>
           <a:xfrm>
-            <a:off x="914400" y="3566160"/>
+            <a:off x="914400" y="3200400"/>
             <a:ext cx="10332720" cy="1463040"/>
           </a:xfrm>
           <a:prstGeom prst="rect">
@@ -5036,7 +5071,59 @@
       </p:sp>
       <p:sp>
         <p:nvSpPr>
-          <p:cNvPr id="6" name="TextBox 5"/>
+          <p:cNvPr id="6" name="Rectangle 5"/>
+          <p:cNvSpPr/>
+          <p:nvPr/>
+        </p:nvSpPr>
+        <p:spPr>
+          <a:xfrm>
+            <a:off x="914400" y="4754880"/>
+            <a:ext cx="10332720" cy="822960"/>
+          </a:xfrm>
+          <a:prstGeom prst="rect">
+            <a:avLst/>
+          </a:prstGeom>
+          <a:solidFill>
+            <a:srgbClr val="5B9DFF"/>
+          </a:solidFill>
+          <a:ln>
+            <a:noFill/>
+          </a:ln>
+        </p:spPr>
+        <p:style>
+          <a:lnRef idx="1">
+            <a:schemeClr val="accent1"/>
+          </a:lnRef>
+          <a:fillRef idx="3">
+            <a:schemeClr val="accent1"/>
+          </a:fillRef>
+          <a:effectRef idx="2">
+            <a:schemeClr val="accent1"/>
+          </a:effectRef>
+          <a:fontRef idx="minor">
+            <a:schemeClr val="lt1"/>
+          </a:fontRef>
+        </p:style>
+        <p:txBody>
+          <a:bodyPr rtlCol="0" anchor="ctr" wrap="square"/>
+          <a:lstStyle/>
+          <a:p>
+            <a:pPr algn="ctr"/>
+            <a:r>
+              <a:rPr sz="2000" b="1" i="0">
+                <a:solidFill>
+                  <a:srgbClr val="0B0D12"/>
+                </a:solidFill>
+                <a:latin typeface="Segoe UI"/>
+              </a:rPr>
+              <a:t>Any agent. Any language. Any framework. Just HTTP.</a:t>
+            </a:r>
+          </a:p>
+        </p:txBody>
+      </p:sp>
+      <p:sp>
+        <p:nvSpPr>
+          <p:cNvPr id="7" name="TextBox 6"/>
           <p:cNvSpPr txBox="1"/>
           <p:nvPr/>
         </p:nvSpPr>
@@ -5070,7 +5157,7 @@
       </p:sp>
       <p:sp>
         <p:nvSpPr>
-          <p:cNvPr id="7" name="TextBox 6"/>
+          <p:cNvPr id="8" name="TextBox 7"/>
           <p:cNvSpPr txBox="1"/>
           <p:nvPr/>
         </p:nvSpPr>
@@ -5198,7 +5285,7 @@
                 </a:solidFill>
                 <a:latin typeface="Segoe UI"/>
               </a:rPr>
-              <a:t>Complete NYC corpus</a:t>
+              <a:t>✓ Complete NYC Administrative &amp; Health Codes</a:t>
             </a:r>
           </a:p>
           <a:p>
@@ -5214,7 +5301,7 @@
                 </a:solidFill>
                 <a:latin typeface="Segoe UI"/>
               </a:rPr>
-              <a:t>No hallucinations</a:t>
+              <a:t>✓ Deterministic, citation-backed legal evidence</a:t>
             </a:r>
           </a:p>
           <a:p>
@@ -5230,7 +5317,7 @@
                 </a:solidFill>
                 <a:latin typeface="Segoe UI"/>
               </a:rPr>
-              <a:t>Live today</a:t>
+              <a:t>✓ Live, agent-ready HTTP skill</a:t>
             </a:r>
           </a:p>
         </p:txBody>
@@ -5872,7 +5959,7 @@
         <p:spPr>
           <a:xfrm>
             <a:off x="914400" y="1737360"/>
-            <a:ext cx="10332720" cy="1463040"/>
+            <a:ext cx="10332720" cy="1280160"/>
           </a:xfrm>
           <a:prstGeom prst="rect">
             <a:avLst/>
@@ -5906,7 +5993,7 @@
           <a:p>
             <a:pPr algn="ctr"/>
             <a:r>
-              <a:rPr sz="2000" b="1" i="1">
+              <a:rPr sz="1800" b="1" i="1">
                 <a:solidFill>
                   <a:srgbClr val="7EE0C3"/>
                 </a:solidFill>
@@ -5925,8 +6012,8 @@
         </p:nvSpPr>
         <p:spPr>
           <a:xfrm>
-            <a:off x="914400" y="3566160"/>
-            <a:ext cx="10332720" cy="1463040"/>
+            <a:off x="914400" y="3200400"/>
+            <a:ext cx="10332720" cy="274320"/>
           </a:xfrm>
           <a:prstGeom prst="rect">
             <a:avLst/>
@@ -5939,35 +6026,14 @@
           </a:bodyPr>
           <a:lstStyle/>
           <a:p>
-            <a:pPr>
-              <a:spcAft>
-                <a:spcPts val="1400"/>
-              </a:spcAft>
-            </a:pPr>
-            <a:r>
-              <a:rPr sz="1800" b="0" i="0">
-                <a:solidFill>
-                  <a:srgbClr val="E8EAED"/>
-                </a:solidFill>
-                <a:latin typeface="Segoe UI"/>
-              </a:rPr>
-              <a:t>▸  No LLM calls, ever — nothing for the service itself to hallucinate</a:t>
-            </a:r>
-          </a:p>
-          <a:p>
-            <a:pPr>
-              <a:spcAft>
-                <a:spcPts val="1400"/>
-              </a:spcAft>
-            </a:pPr>
-            <a:r>
-              <a:rPr sz="1800" b="0" i="0">
-                <a:solidFill>
-                  <a:srgbClr val="E8EAED"/>
-                </a:solidFill>
-                <a:latin typeface="Segoe UI"/>
-              </a:rPr>
-              <a:t>▸  Same query → same citations → same ordering, every time</a:t>
+            <a:r>
+              <a:rPr sz="1300" b="1" i="0">
+                <a:solidFill>
+                  <a:srgbClr val="9AA4B2"/>
+                </a:solidFill>
+                <a:latin typeface="Segoe UI"/>
+              </a:rPr>
+              <a:t>Traditional RAG</a:t>
             </a:r>
           </a:p>
         </p:txBody>
@@ -5980,7 +6046,683 @@
         </p:nvSpPr>
         <p:spPr>
           <a:xfrm>
-            <a:off x="914400" y="4846320"/>
+            <a:off x="914400" y="3493008"/>
+            <a:ext cx="2824276" cy="502920"/>
+          </a:xfrm>
+          <a:prstGeom prst="rect">
+            <a:avLst/>
+          </a:prstGeom>
+          <a:solidFill>
+            <a:srgbClr val="12151C"/>
+          </a:solidFill>
+          <a:ln w="12700">
+            <a:solidFill>
+              <a:srgbClr val="262B36"/>
+            </a:solidFill>
+          </a:ln>
+        </p:spPr>
+        <p:style>
+          <a:lnRef idx="1">
+            <a:schemeClr val="accent1"/>
+          </a:lnRef>
+          <a:fillRef idx="3">
+            <a:schemeClr val="accent1"/>
+          </a:fillRef>
+          <a:effectRef idx="2">
+            <a:schemeClr val="accent1"/>
+          </a:effectRef>
+          <a:fontRef idx="minor">
+            <a:schemeClr val="lt1"/>
+          </a:fontRef>
+        </p:style>
+        <p:txBody>
+          <a:bodyPr rtlCol="0" anchor="ctr" wrap="square"/>
+          <a:lstStyle/>
+          <a:p>
+            <a:pPr algn="ctr"/>
+            <a:r>
+              <a:rPr sz="1000" b="0" i="0">
+                <a:solidFill>
+                  <a:srgbClr val="9AA4B2"/>
+                </a:solidFill>
+                <a:latin typeface="Segoe UI"/>
+              </a:rPr>
+              <a:t>Question</a:t>
+            </a:r>
+          </a:p>
+        </p:txBody>
+      </p:sp>
+      <p:sp>
+        <p:nvSpPr>
+          <p:cNvPr id="7" name="TextBox 6"/>
+          <p:cNvSpPr txBox="1"/>
+          <p:nvPr/>
+        </p:nvSpPr>
+        <p:spPr>
+          <a:xfrm>
+            <a:off x="3738676" y="3493008"/>
+            <a:ext cx="619963" cy="502920"/>
+          </a:xfrm>
+          <a:prstGeom prst="rect">
+            <a:avLst/>
+          </a:prstGeom>
+          <a:noFill/>
+        </p:spPr>
+        <p:txBody>
+          <a:bodyPr wrap="square" anchor="ctr">
+            <a:spAutoFit/>
+          </a:bodyPr>
+          <a:lstStyle/>
+          <a:p>
+            <a:pPr algn="ctr"/>
+            <a:r>
+              <a:rPr sz="1400" b="0" i="0">
+                <a:solidFill>
+                  <a:srgbClr val="9AA4B2"/>
+                </a:solidFill>
+                <a:latin typeface="Segoe UI"/>
+              </a:rPr>
+              <a:t>→</a:t>
+            </a:r>
+          </a:p>
+        </p:txBody>
+      </p:sp>
+      <p:sp>
+        <p:nvSpPr>
+          <p:cNvPr id="8" name="Rectangle 7"/>
+          <p:cNvSpPr/>
+          <p:nvPr/>
+        </p:nvSpPr>
+        <p:spPr>
+          <a:xfrm>
+            <a:off x="4358639" y="3493008"/>
+            <a:ext cx="2824276" cy="502920"/>
+          </a:xfrm>
+          <a:prstGeom prst="rect">
+            <a:avLst/>
+          </a:prstGeom>
+          <a:solidFill>
+            <a:srgbClr val="12151C"/>
+          </a:solidFill>
+          <a:ln w="12700">
+            <a:solidFill>
+              <a:srgbClr val="262B36"/>
+            </a:solidFill>
+          </a:ln>
+        </p:spPr>
+        <p:style>
+          <a:lnRef idx="1">
+            <a:schemeClr val="accent1"/>
+          </a:lnRef>
+          <a:fillRef idx="3">
+            <a:schemeClr val="accent1"/>
+          </a:fillRef>
+          <a:effectRef idx="2">
+            <a:schemeClr val="accent1"/>
+          </a:effectRef>
+          <a:fontRef idx="minor">
+            <a:schemeClr val="lt1"/>
+          </a:fontRef>
+        </p:style>
+        <p:txBody>
+          <a:bodyPr rtlCol="0" anchor="ctr" wrap="square"/>
+          <a:lstStyle/>
+          <a:p>
+            <a:pPr algn="ctr"/>
+            <a:r>
+              <a:rPr sz="1000" b="0" i="0">
+                <a:solidFill>
+                  <a:srgbClr val="9AA4B2"/>
+                </a:solidFill>
+                <a:latin typeface="Segoe UI"/>
+              </a:rPr>
+              <a:t>LLM</a:t>
+            </a:r>
+          </a:p>
+        </p:txBody>
+      </p:sp>
+      <p:sp>
+        <p:nvSpPr>
+          <p:cNvPr id="9" name="TextBox 8"/>
+          <p:cNvSpPr txBox="1"/>
+          <p:nvPr/>
+        </p:nvSpPr>
+        <p:spPr>
+          <a:xfrm>
+            <a:off x="7182915" y="3493008"/>
+            <a:ext cx="619963" cy="502920"/>
+          </a:xfrm>
+          <a:prstGeom prst="rect">
+            <a:avLst/>
+          </a:prstGeom>
+          <a:noFill/>
+        </p:spPr>
+        <p:txBody>
+          <a:bodyPr wrap="square" anchor="ctr">
+            <a:spAutoFit/>
+          </a:bodyPr>
+          <a:lstStyle/>
+          <a:p>
+            <a:pPr algn="ctr"/>
+            <a:r>
+              <a:rPr sz="1400" b="0" i="0">
+                <a:solidFill>
+                  <a:srgbClr val="9AA4B2"/>
+                </a:solidFill>
+                <a:latin typeface="Segoe UI"/>
+              </a:rPr>
+              <a:t>→</a:t>
+            </a:r>
+          </a:p>
+        </p:txBody>
+      </p:sp>
+      <p:sp>
+        <p:nvSpPr>
+          <p:cNvPr id="10" name="Rectangle 9"/>
+          <p:cNvSpPr/>
+          <p:nvPr/>
+        </p:nvSpPr>
+        <p:spPr>
+          <a:xfrm>
+            <a:off x="7802878" y="3493008"/>
+            <a:ext cx="2824276" cy="502920"/>
+          </a:xfrm>
+          <a:prstGeom prst="rect">
+            <a:avLst/>
+          </a:prstGeom>
+          <a:solidFill>
+            <a:srgbClr val="12151C"/>
+          </a:solidFill>
+          <a:ln w="12700">
+            <a:solidFill>
+              <a:srgbClr val="262B36"/>
+            </a:solidFill>
+          </a:ln>
+        </p:spPr>
+        <p:style>
+          <a:lnRef idx="1">
+            <a:schemeClr val="accent1"/>
+          </a:lnRef>
+          <a:fillRef idx="3">
+            <a:schemeClr val="accent1"/>
+          </a:fillRef>
+          <a:effectRef idx="2">
+            <a:schemeClr val="accent1"/>
+          </a:effectRef>
+          <a:fontRef idx="minor">
+            <a:schemeClr val="lt1"/>
+          </a:fontRef>
+        </p:style>
+        <p:txBody>
+          <a:bodyPr rtlCol="0" anchor="ctr" wrap="square"/>
+          <a:lstStyle/>
+          <a:p>
+            <a:pPr algn="ctr"/>
+            <a:r>
+              <a:rPr sz="1000" b="0" i="0">
+                <a:solidFill>
+                  <a:srgbClr val="9AA4B2"/>
+                </a:solidFill>
+                <a:latin typeface="Segoe UI"/>
+              </a:rPr>
+              <a:t>Answer</a:t>
+            </a:r>
+          </a:p>
+        </p:txBody>
+      </p:sp>
+      <p:sp>
+        <p:nvSpPr>
+          <p:cNvPr id="11" name="TextBox 10"/>
+          <p:cNvSpPr txBox="1"/>
+          <p:nvPr/>
+        </p:nvSpPr>
+        <p:spPr>
+          <a:xfrm>
+            <a:off x="914400" y="4133088"/>
+            <a:ext cx="10332720" cy="274320"/>
+          </a:xfrm>
+          <a:prstGeom prst="rect">
+            <a:avLst/>
+          </a:prstGeom>
+          <a:noFill/>
+        </p:spPr>
+        <p:txBody>
+          <a:bodyPr wrap="square" anchor="t">
+            <a:spAutoFit/>
+          </a:bodyPr>
+          <a:lstStyle/>
+          <a:p>
+            <a:r>
+              <a:rPr sz="1300" b="1" i="0">
+                <a:solidFill>
+                  <a:srgbClr val="9AA4B2"/>
+                </a:solidFill>
+                <a:latin typeface="Segoe UI"/>
+              </a:rPr>
+              <a:t>Municipal Law Skill</a:t>
+            </a:r>
+          </a:p>
+        </p:txBody>
+      </p:sp>
+      <p:sp>
+        <p:nvSpPr>
+          <p:cNvPr id="12" name="Rectangle 11"/>
+          <p:cNvSpPr/>
+          <p:nvPr/>
+        </p:nvSpPr>
+        <p:spPr>
+          <a:xfrm>
+            <a:off x="914400" y="4425696"/>
+            <a:ext cx="1694566" cy="502920"/>
+          </a:xfrm>
+          <a:prstGeom prst="rect">
+            <a:avLst/>
+          </a:prstGeom>
+          <a:solidFill>
+            <a:srgbClr val="12151C"/>
+          </a:solidFill>
+          <a:ln w="12700">
+            <a:solidFill>
+              <a:srgbClr val="7EE0C3"/>
+            </a:solidFill>
+          </a:ln>
+        </p:spPr>
+        <p:style>
+          <a:lnRef idx="1">
+            <a:schemeClr val="accent1"/>
+          </a:lnRef>
+          <a:fillRef idx="3">
+            <a:schemeClr val="accent1"/>
+          </a:fillRef>
+          <a:effectRef idx="2">
+            <a:schemeClr val="accent1"/>
+          </a:effectRef>
+          <a:fontRef idx="minor">
+            <a:schemeClr val="lt1"/>
+          </a:fontRef>
+        </p:style>
+        <p:txBody>
+          <a:bodyPr rtlCol="0" anchor="ctr" wrap="square"/>
+          <a:lstStyle/>
+          <a:p>
+            <a:pPr algn="ctr"/>
+            <a:r>
+              <a:rPr sz="1000" b="1" i="0">
+                <a:solidFill>
+                  <a:srgbClr val="7EE0C3"/>
+                </a:solidFill>
+                <a:latin typeface="Segoe UI"/>
+              </a:rPr>
+              <a:t>Question</a:t>
+            </a:r>
+          </a:p>
+        </p:txBody>
+      </p:sp>
+      <p:sp>
+        <p:nvSpPr>
+          <p:cNvPr id="13" name="TextBox 12"/>
+          <p:cNvSpPr txBox="1"/>
+          <p:nvPr/>
+        </p:nvSpPr>
+        <p:spPr>
+          <a:xfrm>
+            <a:off x="2608966" y="4425696"/>
+            <a:ext cx="371977" cy="502920"/>
+          </a:xfrm>
+          <a:prstGeom prst="rect">
+            <a:avLst/>
+          </a:prstGeom>
+          <a:noFill/>
+        </p:spPr>
+        <p:txBody>
+          <a:bodyPr wrap="square" anchor="ctr">
+            <a:spAutoFit/>
+          </a:bodyPr>
+          <a:lstStyle/>
+          <a:p>
+            <a:pPr algn="ctr"/>
+            <a:r>
+              <a:rPr sz="1400" b="0" i="0">
+                <a:solidFill>
+                  <a:srgbClr val="9AA4B2"/>
+                </a:solidFill>
+                <a:latin typeface="Segoe UI"/>
+              </a:rPr>
+              <a:t>→</a:t>
+            </a:r>
+          </a:p>
+        </p:txBody>
+      </p:sp>
+      <p:sp>
+        <p:nvSpPr>
+          <p:cNvPr id="14" name="Rectangle 13"/>
+          <p:cNvSpPr/>
+          <p:nvPr/>
+        </p:nvSpPr>
+        <p:spPr>
+          <a:xfrm>
+            <a:off x="2980943" y="4425696"/>
+            <a:ext cx="1694566" cy="502920"/>
+          </a:xfrm>
+          <a:prstGeom prst="rect">
+            <a:avLst/>
+          </a:prstGeom>
+          <a:solidFill>
+            <a:srgbClr val="12151C"/>
+          </a:solidFill>
+          <a:ln w="12700">
+            <a:solidFill>
+              <a:srgbClr val="7EE0C3"/>
+            </a:solidFill>
+          </a:ln>
+        </p:spPr>
+        <p:style>
+          <a:lnRef idx="1">
+            <a:schemeClr val="accent1"/>
+          </a:lnRef>
+          <a:fillRef idx="3">
+            <a:schemeClr val="accent1"/>
+          </a:fillRef>
+          <a:effectRef idx="2">
+            <a:schemeClr val="accent1"/>
+          </a:effectRef>
+          <a:fontRef idx="minor">
+            <a:schemeClr val="lt1"/>
+          </a:fontRef>
+        </p:style>
+        <p:txBody>
+          <a:bodyPr rtlCol="0" anchor="ctr" wrap="square"/>
+          <a:lstStyle/>
+          <a:p>
+            <a:pPr algn="ctr"/>
+            <a:r>
+              <a:rPr sz="1000" b="1" i="0">
+                <a:solidFill>
+                  <a:srgbClr val="7EE0C3"/>
+                </a:solidFill>
+                <a:latin typeface="Segoe UI"/>
+              </a:rPr>
+              <a:t>Skill</a:t>
+            </a:r>
+          </a:p>
+        </p:txBody>
+      </p:sp>
+      <p:sp>
+        <p:nvSpPr>
+          <p:cNvPr id="15" name="TextBox 14"/>
+          <p:cNvSpPr txBox="1"/>
+          <p:nvPr/>
+        </p:nvSpPr>
+        <p:spPr>
+          <a:xfrm>
+            <a:off x="4675509" y="4425696"/>
+            <a:ext cx="371977" cy="502920"/>
+          </a:xfrm>
+          <a:prstGeom prst="rect">
+            <a:avLst/>
+          </a:prstGeom>
+          <a:noFill/>
+        </p:spPr>
+        <p:txBody>
+          <a:bodyPr wrap="square" anchor="ctr">
+            <a:spAutoFit/>
+          </a:bodyPr>
+          <a:lstStyle/>
+          <a:p>
+            <a:pPr algn="ctr"/>
+            <a:r>
+              <a:rPr sz="1400" b="0" i="0">
+                <a:solidFill>
+                  <a:srgbClr val="9AA4B2"/>
+                </a:solidFill>
+                <a:latin typeface="Segoe UI"/>
+              </a:rPr>
+              <a:t>→</a:t>
+            </a:r>
+          </a:p>
+        </p:txBody>
+      </p:sp>
+      <p:sp>
+        <p:nvSpPr>
+          <p:cNvPr id="16" name="Rectangle 15"/>
+          <p:cNvSpPr/>
+          <p:nvPr/>
+        </p:nvSpPr>
+        <p:spPr>
+          <a:xfrm>
+            <a:off x="5047486" y="4425696"/>
+            <a:ext cx="1694566" cy="502920"/>
+          </a:xfrm>
+          <a:prstGeom prst="rect">
+            <a:avLst/>
+          </a:prstGeom>
+          <a:solidFill>
+            <a:srgbClr val="12151C"/>
+          </a:solidFill>
+          <a:ln w="12700">
+            <a:solidFill>
+              <a:srgbClr val="7EE0C3"/>
+            </a:solidFill>
+          </a:ln>
+        </p:spPr>
+        <p:style>
+          <a:lnRef idx="1">
+            <a:schemeClr val="accent1"/>
+          </a:lnRef>
+          <a:fillRef idx="3">
+            <a:schemeClr val="accent1"/>
+          </a:fillRef>
+          <a:effectRef idx="2">
+            <a:schemeClr val="accent1"/>
+          </a:effectRef>
+          <a:fontRef idx="minor">
+            <a:schemeClr val="lt1"/>
+          </a:fontRef>
+        </p:style>
+        <p:txBody>
+          <a:bodyPr rtlCol="0" anchor="ctr" wrap="square"/>
+          <a:lstStyle/>
+          <a:p>
+            <a:pPr algn="ctr"/>
+            <a:r>
+              <a:rPr sz="1000" b="1" i="0">
+                <a:solidFill>
+                  <a:srgbClr val="7EE0C3"/>
+                </a:solidFill>
+                <a:latin typeface="Segoe UI"/>
+              </a:rPr>
+              <a:t>Official Evidence</a:t>
+            </a:r>
+          </a:p>
+        </p:txBody>
+      </p:sp>
+      <p:sp>
+        <p:nvSpPr>
+          <p:cNvPr id="17" name="TextBox 16"/>
+          <p:cNvSpPr txBox="1"/>
+          <p:nvPr/>
+        </p:nvSpPr>
+        <p:spPr>
+          <a:xfrm>
+            <a:off x="6742052" y="4425696"/>
+            <a:ext cx="371977" cy="502920"/>
+          </a:xfrm>
+          <a:prstGeom prst="rect">
+            <a:avLst/>
+          </a:prstGeom>
+          <a:noFill/>
+        </p:spPr>
+        <p:txBody>
+          <a:bodyPr wrap="square" anchor="ctr">
+            <a:spAutoFit/>
+          </a:bodyPr>
+          <a:lstStyle/>
+          <a:p>
+            <a:pPr algn="ctr"/>
+            <a:r>
+              <a:rPr sz="1400" b="0" i="0">
+                <a:solidFill>
+                  <a:srgbClr val="9AA4B2"/>
+                </a:solidFill>
+                <a:latin typeface="Segoe UI"/>
+              </a:rPr>
+              <a:t>→</a:t>
+            </a:r>
+          </a:p>
+        </p:txBody>
+      </p:sp>
+      <p:sp>
+        <p:nvSpPr>
+          <p:cNvPr id="18" name="Rectangle 17"/>
+          <p:cNvSpPr/>
+          <p:nvPr/>
+        </p:nvSpPr>
+        <p:spPr>
+          <a:xfrm>
+            <a:off x="7114029" y="4425696"/>
+            <a:ext cx="1694566" cy="502920"/>
+          </a:xfrm>
+          <a:prstGeom prst="rect">
+            <a:avLst/>
+          </a:prstGeom>
+          <a:solidFill>
+            <a:srgbClr val="12151C"/>
+          </a:solidFill>
+          <a:ln w="12700">
+            <a:solidFill>
+              <a:srgbClr val="7EE0C3"/>
+            </a:solidFill>
+          </a:ln>
+        </p:spPr>
+        <p:style>
+          <a:lnRef idx="1">
+            <a:schemeClr val="accent1"/>
+          </a:lnRef>
+          <a:fillRef idx="3">
+            <a:schemeClr val="accent1"/>
+          </a:fillRef>
+          <a:effectRef idx="2">
+            <a:schemeClr val="accent1"/>
+          </a:effectRef>
+          <a:fontRef idx="minor">
+            <a:schemeClr val="lt1"/>
+          </a:fontRef>
+        </p:style>
+        <p:txBody>
+          <a:bodyPr rtlCol="0" anchor="ctr" wrap="square"/>
+          <a:lstStyle/>
+          <a:p>
+            <a:pPr algn="ctr"/>
+            <a:r>
+              <a:rPr sz="1000" b="1" i="0">
+                <a:solidFill>
+                  <a:srgbClr val="7EE0C3"/>
+                </a:solidFill>
+                <a:latin typeface="Segoe UI"/>
+              </a:rPr>
+              <a:t>Agent</a:t>
+            </a:r>
+          </a:p>
+        </p:txBody>
+      </p:sp>
+      <p:sp>
+        <p:nvSpPr>
+          <p:cNvPr id="19" name="TextBox 18"/>
+          <p:cNvSpPr txBox="1"/>
+          <p:nvPr/>
+        </p:nvSpPr>
+        <p:spPr>
+          <a:xfrm>
+            <a:off x="8808595" y="4425696"/>
+            <a:ext cx="371977" cy="502920"/>
+          </a:xfrm>
+          <a:prstGeom prst="rect">
+            <a:avLst/>
+          </a:prstGeom>
+          <a:noFill/>
+        </p:spPr>
+        <p:txBody>
+          <a:bodyPr wrap="square" anchor="ctr">
+            <a:spAutoFit/>
+          </a:bodyPr>
+          <a:lstStyle/>
+          <a:p>
+            <a:pPr algn="ctr"/>
+            <a:r>
+              <a:rPr sz="1400" b="0" i="0">
+                <a:solidFill>
+                  <a:srgbClr val="9AA4B2"/>
+                </a:solidFill>
+                <a:latin typeface="Segoe UI"/>
+              </a:rPr>
+              <a:t>→</a:t>
+            </a:r>
+          </a:p>
+        </p:txBody>
+      </p:sp>
+      <p:sp>
+        <p:nvSpPr>
+          <p:cNvPr id="20" name="Rectangle 19"/>
+          <p:cNvSpPr/>
+          <p:nvPr/>
+        </p:nvSpPr>
+        <p:spPr>
+          <a:xfrm>
+            <a:off x="9180572" y="4425696"/>
+            <a:ext cx="1694566" cy="502920"/>
+          </a:xfrm>
+          <a:prstGeom prst="rect">
+            <a:avLst/>
+          </a:prstGeom>
+          <a:solidFill>
+            <a:srgbClr val="12151C"/>
+          </a:solidFill>
+          <a:ln w="12700">
+            <a:solidFill>
+              <a:srgbClr val="7EE0C3"/>
+            </a:solidFill>
+          </a:ln>
+        </p:spPr>
+        <p:style>
+          <a:lnRef idx="1">
+            <a:schemeClr val="accent1"/>
+          </a:lnRef>
+          <a:fillRef idx="3">
+            <a:schemeClr val="accent1"/>
+          </a:fillRef>
+          <a:effectRef idx="2">
+            <a:schemeClr val="accent1"/>
+          </a:effectRef>
+          <a:fontRef idx="minor">
+            <a:schemeClr val="lt1"/>
+          </a:fontRef>
+        </p:style>
+        <p:txBody>
+          <a:bodyPr rtlCol="0" anchor="ctr" wrap="square"/>
+          <a:lstStyle/>
+          <a:p>
+            <a:pPr algn="ctr"/>
+            <a:r>
+              <a:rPr sz="1000" b="1" i="0">
+                <a:solidFill>
+                  <a:srgbClr val="7EE0C3"/>
+                </a:solidFill>
+                <a:latin typeface="Segoe UI"/>
+              </a:rPr>
+              <a:t>Grounded Answer</a:t>
+            </a:r>
+          </a:p>
+        </p:txBody>
+      </p:sp>
+      <p:sp>
+        <p:nvSpPr>
+          <p:cNvPr id="21" name="Rectangle 20"/>
+          <p:cNvSpPr/>
+          <p:nvPr/>
+        </p:nvSpPr>
+        <p:spPr>
+          <a:xfrm>
+            <a:off x="914400" y="5157216"/>
             <a:ext cx="10332720" cy="822960"/>
           </a:xfrm>
           <a:prstGeom prst="rect">
@@ -6026,7 +6768,7 @@
       </p:sp>
       <p:sp>
         <p:nvSpPr>
-          <p:cNvPr id="7" name="TextBox 6"/>
+          <p:cNvPr id="22" name="TextBox 21"/>
           <p:cNvSpPr txBox="1"/>
           <p:nvPr/>
         </p:nvSpPr>
@@ -6060,7 +6802,7 @@
       </p:sp>
       <p:sp>
         <p:nvSpPr>
-          <p:cNvPr id="8" name="TextBox 7"/>
+          <p:cNvPr id="23" name="TextBox 22"/>
           <p:cNvSpPr txBox="1"/>
           <p:nvPr/>
         </p:nvSpPr>
@@ -6238,8 +6980,8 @@
         </p:nvSpPr>
         <p:spPr>
           <a:xfrm>
-            <a:off x="914400" y="2377440"/>
-            <a:ext cx="10332720" cy="777240"/>
+            <a:off x="914400" y="2651760"/>
+            <a:ext cx="2118207" cy="1188720"/>
           </a:xfrm>
           <a:prstGeom prst="rect">
             <a:avLst/>
@@ -6247,7 +6989,7 @@
           <a:solidFill>
             <a:srgbClr val="12151C"/>
           </a:solidFill>
-          <a:ln>
+          <a:ln w="15875">
             <a:solidFill>
               <a:srgbClr val="262B36"/>
             </a:solidFill>
@@ -6268,32 +7010,67 @@
           </a:fontRef>
         </p:style>
         <p:txBody>
-          <a:bodyPr rtlCol="0" anchor="ctr" wrap="square" lIns="228600"/>
+          <a:bodyPr rtlCol="0" anchor="ctr" wrap="square"/>
           <a:lstStyle/>
           <a:p>
             <a:pPr algn="ctr"/>
             <a:r>
-              <a:rPr sz="1500" b="0" i="0">
+              <a:rPr sz="1200" b="0" i="0">
                 <a:solidFill>
                   <a:srgbClr val="E8EAED"/>
                 </a:solidFill>
                 <a:latin typeface="Segoe UI"/>
               </a:rPr>
-              <a:t>1.  User asks the agent a plain-language question</a:t>
-            </a:r>
-          </a:p>
-        </p:txBody>
-      </p:sp>
-      <p:sp>
-        <p:nvSpPr>
-          <p:cNvPr id="6" name="Rectangle 5"/>
+              <a:t>Resident</a:t>
+            </a:r>
+          </a:p>
+        </p:txBody>
+      </p:sp>
+      <p:sp>
+        <p:nvSpPr>
+          <p:cNvPr id="6" name="TextBox 5"/>
+          <p:cNvSpPr txBox="1"/>
+          <p:nvPr/>
+        </p:nvSpPr>
+        <p:spPr>
+          <a:xfrm>
+            <a:off x="3032607" y="2651760"/>
+            <a:ext cx="464972" cy="1188720"/>
+          </a:xfrm>
+          <a:prstGeom prst="rect">
+            <a:avLst/>
+          </a:prstGeom>
+          <a:noFill/>
+        </p:spPr>
+        <p:txBody>
+          <a:bodyPr wrap="square" anchor="ctr">
+            <a:spAutoFit/>
+          </a:bodyPr>
+          <a:lstStyle/>
+          <a:p>
+            <a:pPr algn="ctr"/>
+            <a:r>
+              <a:rPr sz="2000" b="1" i="0">
+                <a:solidFill>
+                  <a:srgbClr val="5B9DFF"/>
+                </a:solidFill>
+                <a:latin typeface="Segoe UI"/>
+              </a:rPr>
+              <a:t>→</a:t>
+            </a:r>
+          </a:p>
+        </p:txBody>
+      </p:sp>
+      <p:sp>
+        <p:nvSpPr>
+          <p:cNvPr id="7" name="Rectangle 6"/>
           <p:cNvSpPr/>
           <p:nvPr/>
         </p:nvSpPr>
         <p:spPr>
           <a:xfrm>
-            <a:off x="914400" y="3230880"/>
-            <a:ext cx="10332720" cy="777240"/>
+            <a:off x="3497579" y="2651760"/>
+            <a:ext cx="2118207" cy="1188720"/>
           </a:xfrm>
           <a:prstGeom prst="rect">
             <a:avLst/>
@@ -6301,7 +7078,7 @@
           <a:solidFill>
             <a:srgbClr val="12151C"/>
           </a:solidFill>
-          <a:ln>
+          <a:ln w="15875">
             <a:solidFill>
               <a:srgbClr val="262B36"/>
             </a:solidFill>
@@ -6322,32 +7099,67 @@
           </a:fontRef>
         </p:style>
         <p:txBody>
-          <a:bodyPr rtlCol="0" anchor="ctr" wrap="square" lIns="228600"/>
+          <a:bodyPr rtlCol="0" anchor="ctr" wrap="square"/>
           <a:lstStyle/>
           <a:p>
             <a:pPr algn="ctr"/>
             <a:r>
-              <a:rPr sz="1500" b="0" i="0">
+              <a:rPr sz="1200" b="0" i="0">
                 <a:solidFill>
                   <a:srgbClr val="E8EAED"/>
                 </a:solidFill>
                 <a:latin typeface="Segoe UI"/>
               </a:rPr>
-              <a:t>2.  Agent calls POST /is_action_allowed</a:t>
-            </a:r>
-          </a:p>
-        </p:txBody>
-      </p:sp>
-      <p:sp>
-        <p:nvSpPr>
-          <p:cNvPr id="7" name="Rectangle 6"/>
+              <a:t>Agent</a:t>
+            </a:r>
+          </a:p>
+        </p:txBody>
+      </p:sp>
+      <p:sp>
+        <p:nvSpPr>
+          <p:cNvPr id="8" name="TextBox 7"/>
+          <p:cNvSpPr txBox="1"/>
+          <p:nvPr/>
+        </p:nvSpPr>
+        <p:spPr>
+          <a:xfrm>
+            <a:off x="5615786" y="2651760"/>
+            <a:ext cx="464972" cy="1188720"/>
+          </a:xfrm>
+          <a:prstGeom prst="rect">
+            <a:avLst/>
+          </a:prstGeom>
+          <a:noFill/>
+        </p:spPr>
+        <p:txBody>
+          <a:bodyPr wrap="square" anchor="ctr">
+            <a:spAutoFit/>
+          </a:bodyPr>
+          <a:lstStyle/>
+          <a:p>
+            <a:pPr algn="ctr"/>
+            <a:r>
+              <a:rPr sz="2000" b="1" i="0">
+                <a:solidFill>
+                  <a:srgbClr val="5B9DFF"/>
+                </a:solidFill>
+                <a:latin typeface="Segoe UI"/>
+              </a:rPr>
+              <a:t>→</a:t>
+            </a:r>
+          </a:p>
+        </p:txBody>
+      </p:sp>
+      <p:sp>
+        <p:nvSpPr>
+          <p:cNvPr id="9" name="Rectangle 8"/>
           <p:cNvSpPr/>
           <p:nvPr/>
         </p:nvSpPr>
         <p:spPr>
           <a:xfrm>
-            <a:off x="914400" y="4084320"/>
-            <a:ext cx="10332720" cy="777240"/>
+            <a:off x="6080758" y="2651760"/>
+            <a:ext cx="2118207" cy="1188720"/>
           </a:xfrm>
           <a:prstGeom prst="rect">
             <a:avLst/>
@@ -6355,7 +7167,7 @@
           <a:solidFill>
             <a:srgbClr val="12151C"/>
           </a:solidFill>
-          <a:ln>
+          <a:ln w="15875">
             <a:solidFill>
               <a:srgbClr val="262B36"/>
             </a:solidFill>
@@ -6376,86 +7188,67 @@
           </a:fontRef>
         </p:style>
         <p:txBody>
-          <a:bodyPr rtlCol="0" anchor="ctr" wrap="square" lIns="228600"/>
+          <a:bodyPr rtlCol="0" anchor="ctr" wrap="square"/>
           <a:lstStyle/>
           <a:p>
             <a:pPr algn="ctr"/>
             <a:r>
-              <a:rPr sz="1500" b="0" i="0">
+              <a:rPr sz="1200" b="0" i="0">
                 <a:solidFill>
                   <a:srgbClr val="E8EAED"/>
                 </a:solidFill>
                 <a:latin typeface="Segoe UI"/>
               </a:rPr>
-              <a:t>3.  Evidence returned: allowed:true (confidence: medium)</a:t>
-            </a:r>
-          </a:p>
-        </p:txBody>
-      </p:sp>
-      <p:sp>
-        <p:nvSpPr>
-          <p:cNvPr id="8" name="Rectangle 7"/>
+              <a:t>POST /is_action_allowed</a:t>
+            </a:r>
+          </a:p>
+        </p:txBody>
+      </p:sp>
+      <p:sp>
+        <p:nvSpPr>
+          <p:cNvPr id="10" name="TextBox 9"/>
+          <p:cNvSpPr txBox="1"/>
+          <p:nvPr/>
+        </p:nvSpPr>
+        <p:spPr>
+          <a:xfrm>
+            <a:off x="8198965" y="2651760"/>
+            <a:ext cx="464972" cy="1188720"/>
+          </a:xfrm>
+          <a:prstGeom prst="rect">
+            <a:avLst/>
+          </a:prstGeom>
+          <a:noFill/>
+        </p:spPr>
+        <p:txBody>
+          <a:bodyPr wrap="square" anchor="ctr">
+            <a:spAutoFit/>
+          </a:bodyPr>
+          <a:lstStyle/>
+          <a:p>
+            <a:pPr algn="ctr"/>
+            <a:r>
+              <a:rPr sz="2000" b="1" i="0">
+                <a:solidFill>
+                  <a:srgbClr val="5B9DFF"/>
+                </a:solidFill>
+                <a:latin typeface="Segoe UI"/>
+              </a:rPr>
+              <a:t>→</a:t>
+            </a:r>
+          </a:p>
+        </p:txBody>
+      </p:sp>
+      <p:sp>
+        <p:nvSpPr>
+          <p:cNvPr id="11" name="Rectangle 10"/>
           <p:cNvSpPr/>
           <p:nvPr/>
         </p:nvSpPr>
         <p:spPr>
           <a:xfrm>
-            <a:off x="914400" y="4937760"/>
-            <a:ext cx="10332720" cy="777240"/>
-          </a:xfrm>
-          <a:prstGeom prst="rect">
-            <a:avLst/>
-          </a:prstGeom>
-          <a:solidFill>
-            <a:srgbClr val="12151C"/>
-          </a:solidFill>
-          <a:ln>
-            <a:solidFill>
-              <a:srgbClr val="5B9DFF"/>
-            </a:solidFill>
-          </a:ln>
-        </p:spPr>
-        <p:style>
-          <a:lnRef idx="1">
-            <a:schemeClr val="accent1"/>
-          </a:lnRef>
-          <a:fillRef idx="3">
-            <a:schemeClr val="accent1"/>
-          </a:fillRef>
-          <a:effectRef idx="2">
-            <a:schemeClr val="accent1"/>
-          </a:effectRef>
-          <a:fontRef idx="minor">
-            <a:schemeClr val="lt1"/>
-          </a:fontRef>
-        </p:style>
-        <p:txBody>
-          <a:bodyPr rtlCol="0" anchor="ctr" wrap="square" lIns="228600"/>
-          <a:lstStyle/>
-          <a:p>
-            <a:pPr algn="ctr"/>
-            <a:r>
-              <a:rPr sz="1500" b="1" i="0">
-                <a:solidFill>
-                  <a:srgbClr val="E8EAED"/>
-                </a:solidFill>
-                <a:latin typeface="Segoe UI"/>
-              </a:rPr>
-              <a:t>4.  Agent answers: “Yes, but roosters are prohibited citywide”</a:t>
-            </a:r>
-          </a:p>
-        </p:txBody>
-      </p:sp>
-      <p:sp>
-        <p:nvSpPr>
-          <p:cNvPr id="9" name="Rectangle 8"/>
-          <p:cNvSpPr/>
-          <p:nvPr/>
-        </p:nvSpPr>
-        <p:spPr>
-          <a:xfrm>
-            <a:off x="914400" y="5882640"/>
-            <a:ext cx="10332720" cy="914400"/>
+            <a:off x="8663937" y="2651760"/>
+            <a:ext cx="2118207" cy="1188720"/>
           </a:xfrm>
           <a:prstGeom prst="rect">
             <a:avLst/>
@@ -6484,37 +7277,60 @@
           </a:fontRef>
         </p:style>
         <p:txBody>
-          <a:bodyPr rtlCol="0" anchor="ctr"/>
+          <a:bodyPr rtlCol="0" anchor="ctr" wrap="square"/>
           <a:lstStyle/>
           <a:p>
             <a:pPr algn="ctr"/>
             <a:r>
-              <a:rPr sz="1200" b="0" i="0">
-                <a:solidFill>
-                  <a:srgbClr val="9AA4B2"/>
-                </a:solidFill>
-                <a:latin typeface="Segoe UI"/>
-              </a:rPr>
-              <a:t>Returned citation</a:t>
-            </a:r>
-          </a:p>
+              <a:rPr sz="1300" b="1" i="0">
+                <a:solidFill>
+                  <a:srgbClr val="7EE0C3"/>
+                </a:solidFill>
+                <a:latin typeface="Segoe UI"/>
+              </a:rPr>
+              <a:t>NYC Health Code §161.19</a:t>
+            </a:r>
+          </a:p>
+        </p:txBody>
+      </p:sp>
+      <p:sp>
+        <p:nvSpPr>
+          <p:cNvPr id="12" name="TextBox 11"/>
+          <p:cNvSpPr txBox="1"/>
+          <p:nvPr/>
+        </p:nvSpPr>
+        <p:spPr>
+          <a:xfrm>
+            <a:off x="1097280" y="4114800"/>
+            <a:ext cx="9966960" cy="914400"/>
+          </a:xfrm>
+          <a:prstGeom prst="rect">
+            <a:avLst/>
+          </a:prstGeom>
+          <a:noFill/>
+        </p:spPr>
+        <p:txBody>
+          <a:bodyPr wrap="square" anchor="ctr">
+            <a:spAutoFit/>
+          </a:bodyPr>
+          <a:lstStyle/>
           <a:p>
             <a:pPr algn="ctr"/>
             <a:r>
-              <a:rPr sz="2400" b="1" i="0">
-                <a:solidFill>
-                  <a:srgbClr val="7EE0C3"/>
-                </a:solidFill>
-                <a:latin typeface="Segoe UI"/>
-              </a:rPr>
-              <a:t>NYC Health Code §161.19</a:t>
-            </a:r>
-          </a:p>
-        </p:txBody>
-      </p:sp>
-      <p:sp>
-        <p:nvSpPr>
-          <p:cNvPr id="10" name="TextBox 9"/>
+              <a:rPr sz="1700" b="0" i="1">
+                <a:solidFill>
+                  <a:srgbClr val="E8EAED"/>
+                </a:solidFill>
+                <a:latin typeface="Segoe UI"/>
+              </a:rPr>
+              <a:t>“Yes, but roosters are prohibited citywide”</a:t>
+            </a:r>
+          </a:p>
+        </p:txBody>
+      </p:sp>
+      <p:sp>
+        <p:nvSpPr>
+          <p:cNvPr id="13" name="TextBox 12"/>
           <p:cNvSpPr txBox="1"/>
           <p:nvPr/>
         </p:nvSpPr>
@@ -6548,7 +7364,7 @@
       </p:sp>
       <p:sp>
         <p:nvSpPr>
-          <p:cNvPr id="11" name="TextBox 10"/>
+          <p:cNvPr id="14" name="TextBox 13"/>
           <p:cNvSpPr txBox="1"/>
           <p:nvPr/>
         </p:nvSpPr>
@@ -6726,8 +7542,8 @@
         </p:nvSpPr>
         <p:spPr>
           <a:xfrm>
-            <a:off x="914400" y="2377440"/>
-            <a:ext cx="10332720" cy="777240"/>
+            <a:off x="914400" y="2651760"/>
+            <a:ext cx="2118207" cy="1188720"/>
           </a:xfrm>
           <a:prstGeom prst="rect">
             <a:avLst/>
@@ -6735,7 +7551,7 @@
           <a:solidFill>
             <a:srgbClr val="12151C"/>
           </a:solidFill>
-          <a:ln>
+          <a:ln w="15875">
             <a:solidFill>
               <a:srgbClr val="262B36"/>
             </a:solidFill>
@@ -6756,32 +7572,67 @@
           </a:fontRef>
         </p:style>
         <p:txBody>
-          <a:bodyPr rtlCol="0" anchor="ctr" wrap="square" lIns="228600"/>
+          <a:bodyPr rtlCol="0" anchor="ctr" wrap="square"/>
           <a:lstStyle/>
           <a:p>
             <a:pPr algn="ctr"/>
             <a:r>
-              <a:rPr sz="1500" b="0" i="0">
+              <a:rPr sz="1200" b="0" i="0">
                 <a:solidFill>
                   <a:srgbClr val="E8EAED"/>
                 </a:solidFill>
                 <a:latin typeface="Segoe UI"/>
               </a:rPr>
-              <a:t>1.  User asks the agent a plain-language question</a:t>
-            </a:r>
-          </a:p>
-        </p:txBody>
-      </p:sp>
-      <p:sp>
-        <p:nvSpPr>
-          <p:cNvPr id="6" name="Rectangle 5"/>
+              <a:t>Food vendor</a:t>
+            </a:r>
+          </a:p>
+        </p:txBody>
+      </p:sp>
+      <p:sp>
+        <p:nvSpPr>
+          <p:cNvPr id="6" name="TextBox 5"/>
+          <p:cNvSpPr txBox="1"/>
+          <p:nvPr/>
+        </p:nvSpPr>
+        <p:spPr>
+          <a:xfrm>
+            <a:off x="3032607" y="2651760"/>
+            <a:ext cx="464972" cy="1188720"/>
+          </a:xfrm>
+          <a:prstGeom prst="rect">
+            <a:avLst/>
+          </a:prstGeom>
+          <a:noFill/>
+        </p:spPr>
+        <p:txBody>
+          <a:bodyPr wrap="square" anchor="ctr">
+            <a:spAutoFit/>
+          </a:bodyPr>
+          <a:lstStyle/>
+          <a:p>
+            <a:pPr algn="ctr"/>
+            <a:r>
+              <a:rPr sz="2000" b="1" i="0">
+                <a:solidFill>
+                  <a:srgbClr val="5B9DFF"/>
+                </a:solidFill>
+                <a:latin typeface="Segoe UI"/>
+              </a:rPr>
+              <a:t>→</a:t>
+            </a:r>
+          </a:p>
+        </p:txBody>
+      </p:sp>
+      <p:sp>
+        <p:nvSpPr>
+          <p:cNvPr id="7" name="Rectangle 6"/>
           <p:cNvSpPr/>
           <p:nvPr/>
         </p:nvSpPr>
         <p:spPr>
           <a:xfrm>
-            <a:off x="914400" y="3230880"/>
-            <a:ext cx="10332720" cy="777240"/>
+            <a:off x="3497579" y="2651760"/>
+            <a:ext cx="2118207" cy="1188720"/>
           </a:xfrm>
           <a:prstGeom prst="rect">
             <a:avLst/>
@@ -6789,7 +7640,7 @@
           <a:solidFill>
             <a:srgbClr val="12151C"/>
           </a:solidFill>
-          <a:ln>
+          <a:ln w="15875">
             <a:solidFill>
               <a:srgbClr val="262B36"/>
             </a:solidFill>
@@ -6810,32 +7661,67 @@
           </a:fontRef>
         </p:style>
         <p:txBody>
-          <a:bodyPr rtlCol="0" anchor="ctr" wrap="square" lIns="228600"/>
+          <a:bodyPr rtlCol="0" anchor="ctr" wrap="square"/>
           <a:lstStyle/>
           <a:p>
             <a:pPr algn="ctr"/>
             <a:r>
-              <a:rPr sz="1500" b="0" i="0">
+              <a:rPr sz="1200" b="0" i="0">
                 <a:solidFill>
                   <a:srgbClr val="E8EAED"/>
                 </a:solidFill>
                 <a:latin typeface="Segoe UI"/>
               </a:rPr>
-              <a:t>2.  Agent calls POST /permits {"query": "mobile food vending unit license permit"}</a:t>
-            </a:r>
-          </a:p>
-        </p:txBody>
-      </p:sp>
-      <p:sp>
-        <p:nvSpPr>
-          <p:cNvPr id="7" name="Rectangle 6"/>
+              <a:t>Agent</a:t>
+            </a:r>
+          </a:p>
+        </p:txBody>
+      </p:sp>
+      <p:sp>
+        <p:nvSpPr>
+          <p:cNvPr id="8" name="TextBox 7"/>
+          <p:cNvSpPr txBox="1"/>
+          <p:nvPr/>
+        </p:nvSpPr>
+        <p:spPr>
+          <a:xfrm>
+            <a:off x="5615786" y="2651760"/>
+            <a:ext cx="464972" cy="1188720"/>
+          </a:xfrm>
+          <a:prstGeom prst="rect">
+            <a:avLst/>
+          </a:prstGeom>
+          <a:noFill/>
+        </p:spPr>
+        <p:txBody>
+          <a:bodyPr wrap="square" anchor="ctr">
+            <a:spAutoFit/>
+          </a:bodyPr>
+          <a:lstStyle/>
+          <a:p>
+            <a:pPr algn="ctr"/>
+            <a:r>
+              <a:rPr sz="2000" b="1" i="0">
+                <a:solidFill>
+                  <a:srgbClr val="5B9DFF"/>
+                </a:solidFill>
+                <a:latin typeface="Segoe UI"/>
+              </a:rPr>
+              <a:t>→</a:t>
+            </a:r>
+          </a:p>
+        </p:txBody>
+      </p:sp>
+      <p:sp>
+        <p:nvSpPr>
+          <p:cNvPr id="9" name="Rectangle 8"/>
           <p:cNvSpPr/>
           <p:nvPr/>
         </p:nvSpPr>
         <p:spPr>
           <a:xfrm>
-            <a:off x="914400" y="4084320"/>
-            <a:ext cx="10332720" cy="777240"/>
+            <a:off x="6080758" y="2651760"/>
+            <a:ext cx="2118207" cy="1188720"/>
           </a:xfrm>
           <a:prstGeom prst="rect">
             <a:avLst/>
@@ -6843,7 +7729,7 @@
           <a:solidFill>
             <a:srgbClr val="12151C"/>
           </a:solidFill>
-          <a:ln>
+          <a:ln w="15875">
             <a:solidFill>
               <a:srgbClr val="262B36"/>
             </a:solidFill>
@@ -6864,86 +7750,67 @@
           </a:fontRef>
         </p:style>
         <p:txBody>
-          <a:bodyPr rtlCol="0" anchor="ctr" wrap="square" lIns="228600"/>
+          <a:bodyPr rtlCol="0" anchor="ctr" wrap="square"/>
           <a:lstStyle/>
           <a:p>
             <a:pPr algn="ctr"/>
             <a:r>
-              <a:rPr sz="1500" b="0" i="0">
+              <a:rPr sz="1200" b="0" i="0">
                 <a:solidFill>
                   <a:srgbClr val="E8EAED"/>
                 </a:solidFill>
                 <a:latin typeface="Segoe UI"/>
               </a:rPr>
-              <a:t>3.  Evidence returned: §89.11 “Applications for permits and licenses”</a:t>
-            </a:r>
-          </a:p>
-        </p:txBody>
-      </p:sp>
-      <p:sp>
-        <p:nvSpPr>
-          <p:cNvPr id="8" name="Rectangle 7"/>
+              <a:t>POST /permits</a:t>
+            </a:r>
+          </a:p>
+        </p:txBody>
+      </p:sp>
+      <p:sp>
+        <p:nvSpPr>
+          <p:cNvPr id="10" name="TextBox 9"/>
+          <p:cNvSpPr txBox="1"/>
+          <p:nvPr/>
+        </p:nvSpPr>
+        <p:spPr>
+          <a:xfrm>
+            <a:off x="8198965" y="2651760"/>
+            <a:ext cx="464972" cy="1188720"/>
+          </a:xfrm>
+          <a:prstGeom prst="rect">
+            <a:avLst/>
+          </a:prstGeom>
+          <a:noFill/>
+        </p:spPr>
+        <p:txBody>
+          <a:bodyPr wrap="square" anchor="ctr">
+            <a:spAutoFit/>
+          </a:bodyPr>
+          <a:lstStyle/>
+          <a:p>
+            <a:pPr algn="ctr"/>
+            <a:r>
+              <a:rPr sz="2000" b="1" i="0">
+                <a:solidFill>
+                  <a:srgbClr val="5B9DFF"/>
+                </a:solidFill>
+                <a:latin typeface="Segoe UI"/>
+              </a:rPr>
+              <a:t>→</a:t>
+            </a:r>
+          </a:p>
+        </p:txBody>
+      </p:sp>
+      <p:sp>
+        <p:nvSpPr>
+          <p:cNvPr id="11" name="Rectangle 10"/>
           <p:cNvSpPr/>
           <p:nvPr/>
         </p:nvSpPr>
         <p:spPr>
           <a:xfrm>
-            <a:off x="914400" y="4937760"/>
-            <a:ext cx="10332720" cy="777240"/>
-          </a:xfrm>
-          <a:prstGeom prst="rect">
-            <a:avLst/>
-          </a:prstGeom>
-          <a:solidFill>
-            <a:srgbClr val="12151C"/>
-          </a:solidFill>
-          <a:ln>
-            <a:solidFill>
-              <a:srgbClr val="5B9DFF"/>
-            </a:solidFill>
-          </a:ln>
-        </p:spPr>
-        <p:style>
-          <a:lnRef idx="1">
-            <a:schemeClr val="accent1"/>
-          </a:lnRef>
-          <a:fillRef idx="3">
-            <a:schemeClr val="accent1"/>
-          </a:fillRef>
-          <a:effectRef idx="2">
-            <a:schemeClr val="accent1"/>
-          </a:effectRef>
-          <a:fontRef idx="minor">
-            <a:schemeClr val="lt1"/>
-          </a:fontRef>
-        </p:style>
-        <p:txBody>
-          <a:bodyPr rtlCol="0" anchor="ctr" wrap="square" lIns="228600"/>
-          <a:lstStyle/>
-          <a:p>
-            <a:pPr algn="ctr"/>
-            <a:r>
-              <a:rPr sz="1500" b="1" i="0">
-                <a:solidFill>
-                  <a:srgbClr val="E8EAED"/>
-                </a:solidFill>
-                <a:latin typeface="Segoe UI"/>
-              </a:rPr>
-              <a:t>4.  Agent answers: “You need a vending permit/license under §89.11 — fees are set by §17-308”</a:t>
-            </a:r>
-          </a:p>
-        </p:txBody>
-      </p:sp>
-      <p:sp>
-        <p:nvSpPr>
-          <p:cNvPr id="9" name="Rectangle 8"/>
-          <p:cNvSpPr/>
-          <p:nvPr/>
-        </p:nvSpPr>
-        <p:spPr>
-          <a:xfrm>
-            <a:off x="914400" y="5882640"/>
-            <a:ext cx="10332720" cy="914400"/>
+            <a:off x="8663937" y="2651760"/>
+            <a:ext cx="2118207" cy="1188720"/>
           </a:xfrm>
           <a:prstGeom prst="rect">
             <a:avLst/>
@@ -6972,37 +7839,60 @@
           </a:fontRef>
         </p:style>
         <p:txBody>
-          <a:bodyPr rtlCol="0" anchor="ctr"/>
+          <a:bodyPr rtlCol="0" anchor="ctr" wrap="square"/>
           <a:lstStyle/>
           <a:p>
             <a:pPr algn="ctr"/>
             <a:r>
-              <a:rPr sz="1200" b="0" i="0">
-                <a:solidFill>
-                  <a:srgbClr val="9AA4B2"/>
-                </a:solidFill>
-                <a:latin typeface="Segoe UI"/>
-              </a:rPr>
-              <a:t>Returned citation</a:t>
-            </a:r>
-          </a:p>
+              <a:rPr sz="1300" b="1" i="0">
+                <a:solidFill>
+                  <a:srgbClr val="7EE0C3"/>
+                </a:solidFill>
+                <a:latin typeface="Segoe UI"/>
+              </a:rPr>
+              <a:t>§89.11 Applications for permits and licenses</a:t>
+            </a:r>
+          </a:p>
+        </p:txBody>
+      </p:sp>
+      <p:sp>
+        <p:nvSpPr>
+          <p:cNvPr id="12" name="TextBox 11"/>
+          <p:cNvSpPr txBox="1"/>
+          <p:nvPr/>
+        </p:nvSpPr>
+        <p:spPr>
+          <a:xfrm>
+            <a:off x="1097280" y="4114800"/>
+            <a:ext cx="9966960" cy="914400"/>
+          </a:xfrm>
+          <a:prstGeom prst="rect">
+            <a:avLst/>
+          </a:prstGeom>
+          <a:noFill/>
+        </p:spPr>
+        <p:txBody>
+          <a:bodyPr wrap="square" anchor="ctr">
+            <a:spAutoFit/>
+          </a:bodyPr>
+          <a:lstStyle/>
           <a:p>
             <a:pPr algn="ctr"/>
             <a:r>
-              <a:rPr sz="2400" b="1" i="0">
-                <a:solidFill>
-                  <a:srgbClr val="7EE0C3"/>
-                </a:solidFill>
-                <a:latin typeface="Segoe UI"/>
-              </a:rPr>
-              <a:t>NYC Health Code §89.11</a:t>
-            </a:r>
-          </a:p>
-        </p:txBody>
-      </p:sp>
-      <p:sp>
-        <p:nvSpPr>
-          <p:cNvPr id="10" name="TextBox 9"/>
+              <a:rPr sz="1700" b="0" i="1">
+                <a:solidFill>
+                  <a:srgbClr val="E8EAED"/>
+                </a:solidFill>
+                <a:latin typeface="Segoe UI"/>
+              </a:rPr>
+              <a:t>“You need a vending permit/license under §89.11 — fees are set by §17-308”</a:t>
+            </a:r>
+          </a:p>
+        </p:txBody>
+      </p:sp>
+      <p:sp>
+        <p:nvSpPr>
+          <p:cNvPr id="13" name="TextBox 12"/>
           <p:cNvSpPr txBox="1"/>
           <p:nvPr/>
         </p:nvSpPr>
@@ -7036,7 +7926,7 @@
       </p:sp>
       <p:sp>
         <p:nvSpPr>
-          <p:cNvPr id="11" name="TextBox 10"/>
+          <p:cNvPr id="14" name="TextBox 13"/>
           <p:cNvSpPr txBox="1"/>
           <p:nvPr/>
         </p:nvSpPr>
@@ -7214,8 +8104,8 @@
         </p:nvSpPr>
         <p:spPr>
           <a:xfrm>
-            <a:off x="914400" y="2377440"/>
-            <a:ext cx="10332720" cy="777240"/>
+            <a:off x="914400" y="2651760"/>
+            <a:ext cx="2118207" cy="1188720"/>
           </a:xfrm>
           <a:prstGeom prst="rect">
             <a:avLst/>
@@ -7223,7 +8113,7 @@
           <a:solidFill>
             <a:srgbClr val="12151C"/>
           </a:solidFill>
-          <a:ln>
+          <a:ln w="15875">
             <a:solidFill>
               <a:srgbClr val="262B36"/>
             </a:solidFill>
@@ -7244,32 +8134,67 @@
           </a:fontRef>
         </p:style>
         <p:txBody>
-          <a:bodyPr rtlCol="0" anchor="ctr" wrap="square" lIns="228600"/>
+          <a:bodyPr rtlCol="0" anchor="ctr" wrap="square"/>
           <a:lstStyle/>
           <a:p>
             <a:pPr algn="ctr"/>
             <a:r>
-              <a:rPr sz="1500" b="0" i="0">
+              <a:rPr sz="1200" b="0" i="0">
                 <a:solidFill>
                   <a:srgbClr val="E8EAED"/>
                 </a:solidFill>
                 <a:latin typeface="Segoe UI"/>
               </a:rPr>
-              <a:t>1.  User asks the agent a plain-language question</a:t>
-            </a:r>
-          </a:p>
-        </p:txBody>
-      </p:sp>
-      <p:sp>
-        <p:nvSpPr>
-          <p:cNvPr id="6" name="Rectangle 5"/>
+              <a:t>Building owner</a:t>
+            </a:r>
+          </a:p>
+        </p:txBody>
+      </p:sp>
+      <p:sp>
+        <p:nvSpPr>
+          <p:cNvPr id="6" name="TextBox 5"/>
+          <p:cNvSpPr txBox="1"/>
+          <p:nvPr/>
+        </p:nvSpPr>
+        <p:spPr>
+          <a:xfrm>
+            <a:off x="3032607" y="2651760"/>
+            <a:ext cx="464972" cy="1188720"/>
+          </a:xfrm>
+          <a:prstGeom prst="rect">
+            <a:avLst/>
+          </a:prstGeom>
+          <a:noFill/>
+        </p:spPr>
+        <p:txBody>
+          <a:bodyPr wrap="square" anchor="ctr">
+            <a:spAutoFit/>
+          </a:bodyPr>
+          <a:lstStyle/>
+          <a:p>
+            <a:pPr algn="ctr"/>
+            <a:r>
+              <a:rPr sz="2000" b="1" i="0">
+                <a:solidFill>
+                  <a:srgbClr val="5B9DFF"/>
+                </a:solidFill>
+                <a:latin typeface="Segoe UI"/>
+              </a:rPr>
+              <a:t>→</a:t>
+            </a:r>
+          </a:p>
+        </p:txBody>
+      </p:sp>
+      <p:sp>
+        <p:nvSpPr>
+          <p:cNvPr id="7" name="Rectangle 6"/>
           <p:cNvSpPr/>
           <p:nvPr/>
         </p:nvSpPr>
         <p:spPr>
           <a:xfrm>
-            <a:off x="914400" y="3230880"/>
-            <a:ext cx="10332720" cy="777240"/>
+            <a:off x="3497579" y="2651760"/>
+            <a:ext cx="2118207" cy="1188720"/>
           </a:xfrm>
           <a:prstGeom prst="rect">
             <a:avLst/>
@@ -7277,7 +8202,7 @@
           <a:solidFill>
             <a:srgbClr val="12151C"/>
           </a:solidFill>
-          <a:ln>
+          <a:ln w="15875">
             <a:solidFill>
               <a:srgbClr val="262B36"/>
             </a:solidFill>
@@ -7298,32 +8223,67 @@
           </a:fontRef>
         </p:style>
         <p:txBody>
-          <a:bodyPr rtlCol="0" anchor="ctr" wrap="square" lIns="228600"/>
+          <a:bodyPr rtlCol="0" anchor="ctr" wrap="square"/>
           <a:lstStyle/>
           <a:p>
             <a:pPr algn="ctr"/>
             <a:r>
-              <a:rPr sz="1500" b="0" i="0">
+              <a:rPr sz="1200" b="0" i="0">
                 <a:solidFill>
                   <a:srgbClr val="E8EAED"/>
                 </a:solidFill>
                 <a:latin typeface="Segoe UI"/>
               </a:rPr>
-              <a:t>2.  Agent calls POST /penalties → GET /sections/16-119</a:t>
-            </a:r>
-          </a:p>
-        </p:txBody>
-      </p:sp>
-      <p:sp>
-        <p:nvSpPr>
-          <p:cNvPr id="7" name="Rectangle 6"/>
+              <a:t>Agent</a:t>
+            </a:r>
+          </a:p>
+        </p:txBody>
+      </p:sp>
+      <p:sp>
+        <p:nvSpPr>
+          <p:cNvPr id="8" name="TextBox 7"/>
+          <p:cNvSpPr txBox="1"/>
+          <p:nvPr/>
+        </p:nvSpPr>
+        <p:spPr>
+          <a:xfrm>
+            <a:off x="5615786" y="2651760"/>
+            <a:ext cx="464972" cy="1188720"/>
+          </a:xfrm>
+          <a:prstGeom prst="rect">
+            <a:avLst/>
+          </a:prstGeom>
+          <a:noFill/>
+        </p:spPr>
+        <p:txBody>
+          <a:bodyPr wrap="square" anchor="ctr">
+            <a:spAutoFit/>
+          </a:bodyPr>
+          <a:lstStyle/>
+          <a:p>
+            <a:pPr algn="ctr"/>
+            <a:r>
+              <a:rPr sz="2000" b="1" i="0">
+                <a:solidFill>
+                  <a:srgbClr val="5B9DFF"/>
+                </a:solidFill>
+                <a:latin typeface="Segoe UI"/>
+              </a:rPr>
+              <a:t>→</a:t>
+            </a:r>
+          </a:p>
+        </p:txBody>
+      </p:sp>
+      <p:sp>
+        <p:nvSpPr>
+          <p:cNvPr id="9" name="Rectangle 8"/>
           <p:cNvSpPr/>
           <p:nvPr/>
         </p:nvSpPr>
         <p:spPr>
           <a:xfrm>
-            <a:off x="914400" y="4084320"/>
-            <a:ext cx="10332720" cy="777240"/>
+            <a:off x="6080758" y="2651760"/>
+            <a:ext cx="2118207" cy="1188720"/>
           </a:xfrm>
           <a:prstGeom prst="rect">
             <a:avLst/>
@@ -7331,7 +8291,7 @@
           <a:solidFill>
             <a:srgbClr val="12151C"/>
           </a:solidFill>
-          <a:ln>
+          <a:ln w="15875">
             <a:solidFill>
               <a:srgbClr val="262B36"/>
             </a:solidFill>
@@ -7352,86 +8312,67 @@
           </a:fontRef>
         </p:style>
         <p:txBody>
-          <a:bodyPr rtlCol="0" anchor="ctr" wrap="square" lIns="228600"/>
+          <a:bodyPr rtlCol="0" anchor="ctr" wrap="square"/>
           <a:lstStyle/>
           <a:p>
             <a:pPr algn="ctr"/>
             <a:r>
-              <a:rPr sz="1500" b="0" i="0">
+              <a:rPr sz="1200" b="0" i="0">
                 <a:solidFill>
                   <a:srgbClr val="E8EAED"/>
                 </a:solidFill>
                 <a:latin typeface="Segoe UI"/>
               </a:rPr>
-              <a:t>3.  Evidence returned: §16-119 “Dumping prohibited” — misdemeanor, vehicle impoundment</a:t>
-            </a:r>
-          </a:p>
-        </p:txBody>
-      </p:sp>
-      <p:sp>
-        <p:nvSpPr>
-          <p:cNvPr id="8" name="Rectangle 7"/>
+              <a:t>POST /penalties → GET /sections/16-119</a:t>
+            </a:r>
+          </a:p>
+        </p:txBody>
+      </p:sp>
+      <p:sp>
+        <p:nvSpPr>
+          <p:cNvPr id="10" name="TextBox 9"/>
+          <p:cNvSpPr txBox="1"/>
+          <p:nvPr/>
+        </p:nvSpPr>
+        <p:spPr>
+          <a:xfrm>
+            <a:off x="8198965" y="2651760"/>
+            <a:ext cx="464972" cy="1188720"/>
+          </a:xfrm>
+          <a:prstGeom prst="rect">
+            <a:avLst/>
+          </a:prstGeom>
+          <a:noFill/>
+        </p:spPr>
+        <p:txBody>
+          <a:bodyPr wrap="square" anchor="ctr">
+            <a:spAutoFit/>
+          </a:bodyPr>
+          <a:lstStyle/>
+          <a:p>
+            <a:pPr algn="ctr"/>
+            <a:r>
+              <a:rPr sz="2000" b="1" i="0">
+                <a:solidFill>
+                  <a:srgbClr val="5B9DFF"/>
+                </a:solidFill>
+                <a:latin typeface="Segoe UI"/>
+              </a:rPr>
+              <a:t>→</a:t>
+            </a:r>
+          </a:p>
+        </p:txBody>
+      </p:sp>
+      <p:sp>
+        <p:nvSpPr>
+          <p:cNvPr id="11" name="Rectangle 10"/>
           <p:cNvSpPr/>
           <p:nvPr/>
         </p:nvSpPr>
         <p:spPr>
           <a:xfrm>
-            <a:off x="914400" y="4937760"/>
-            <a:ext cx="10332720" cy="777240"/>
-          </a:xfrm>
-          <a:prstGeom prst="rect">
-            <a:avLst/>
-          </a:prstGeom>
-          <a:solidFill>
-            <a:srgbClr val="12151C"/>
-          </a:solidFill>
-          <a:ln>
-            <a:solidFill>
-              <a:srgbClr val="5B9DFF"/>
-            </a:solidFill>
-          </a:ln>
-        </p:spPr>
-        <p:style>
-          <a:lnRef idx="1">
-            <a:schemeClr val="accent1"/>
-          </a:lnRef>
-          <a:fillRef idx="3">
-            <a:schemeClr val="accent1"/>
-          </a:fillRef>
-          <a:effectRef idx="2">
-            <a:schemeClr val="accent1"/>
-          </a:effectRef>
-          <a:fontRef idx="minor">
-            <a:schemeClr val="lt1"/>
-          </a:fontRef>
-        </p:style>
-        <p:txBody>
-          <a:bodyPr rtlCol="0" anchor="ctr" wrap="square" lIns="228600"/>
-          <a:lstStyle/>
-          <a:p>
-            <a:pPr algn="ctr"/>
-            <a:r>
-              <a:rPr sz="1500" b="1" i="0">
-                <a:solidFill>
-                  <a:srgbClr val="E8EAED"/>
-                </a:solidFill>
-                <a:latin typeface="Segoe UI"/>
-              </a:rPr>
-              <a:t>4.  Agent answers with real dollar figures, straight from the statute</a:t>
-            </a:r>
-          </a:p>
-        </p:txBody>
-      </p:sp>
-      <p:sp>
-        <p:nvSpPr>
-          <p:cNvPr id="9" name="Rectangle 8"/>
-          <p:cNvSpPr/>
-          <p:nvPr/>
-        </p:nvSpPr>
-        <p:spPr>
-          <a:xfrm>
-            <a:off x="914400" y="5882640"/>
-            <a:ext cx="10332720" cy="914400"/>
+            <a:off x="8663937" y="2651760"/>
+            <a:ext cx="2118207" cy="1188720"/>
           </a:xfrm>
           <a:prstGeom prst="rect">
             <a:avLst/>
@@ -7460,37 +8401,60 @@
           </a:fontRef>
         </p:style>
         <p:txBody>
-          <a:bodyPr rtlCol="0" anchor="ctr"/>
+          <a:bodyPr rtlCol="0" anchor="ctr" wrap="square"/>
           <a:lstStyle/>
           <a:p>
             <a:pPr algn="ctr"/>
             <a:r>
-              <a:rPr sz="1200" b="0" i="0">
-                <a:solidFill>
-                  <a:srgbClr val="9AA4B2"/>
-                </a:solidFill>
-                <a:latin typeface="Segoe UI"/>
-              </a:rPr>
-              <a:t>Returned directly from statute</a:t>
-            </a:r>
-          </a:p>
+              <a:rPr sz="1300" b="1" i="0">
+                <a:solidFill>
+                  <a:srgbClr val="7EE0C3"/>
+                </a:solidFill>
+                <a:latin typeface="Segoe UI"/>
+              </a:rPr>
+              <a:t>$1,500 – $10,000 civil penalty</a:t>
+            </a:r>
+          </a:p>
+        </p:txBody>
+      </p:sp>
+      <p:sp>
+        <p:nvSpPr>
+          <p:cNvPr id="12" name="TextBox 11"/>
+          <p:cNvSpPr txBox="1"/>
+          <p:nvPr/>
+        </p:nvSpPr>
+        <p:spPr>
+          <a:xfrm>
+            <a:off x="1097280" y="4114800"/>
+            <a:ext cx="9966960" cy="914400"/>
+          </a:xfrm>
+          <a:prstGeom prst="rect">
+            <a:avLst/>
+          </a:prstGeom>
+          <a:noFill/>
+        </p:spPr>
+        <p:txBody>
+          <a:bodyPr wrap="square" anchor="ctr">
+            <a:spAutoFit/>
+          </a:bodyPr>
+          <a:lstStyle/>
           <a:p>
             <a:pPr algn="ctr"/>
             <a:r>
-              <a:rPr sz="2400" b="1" i="0">
-                <a:solidFill>
-                  <a:srgbClr val="7EE0C3"/>
-                </a:solidFill>
-                <a:latin typeface="Segoe UI"/>
-              </a:rPr>
-              <a:t>$1,500 – $10,000 civil penalty</a:t>
-            </a:r>
-          </a:p>
-        </p:txBody>
-      </p:sp>
-      <p:sp>
-        <p:nvSpPr>
-          <p:cNvPr id="10" name="TextBox 9"/>
+              <a:rPr sz="1700" b="0" i="1">
+                <a:solidFill>
+                  <a:srgbClr val="E8EAED"/>
+                </a:solidFill>
+                <a:latin typeface="Segoe UI"/>
+              </a:rPr>
+              <a:t>Real dollar figures, straight from the statute — not a vague “consult a lawyer.”</a:t>
+            </a:r>
+          </a:p>
+        </p:txBody>
+      </p:sp>
+      <p:sp>
+        <p:nvSpPr>
+          <p:cNvPr id="13" name="TextBox 12"/>
           <p:cNvSpPr txBox="1"/>
           <p:nvPr/>
         </p:nvSpPr>
@@ -7524,7 +8488,7 @@
       </p:sp>
       <p:sp>
         <p:nvSpPr>
-          <p:cNvPr id="11" name="TextBox 10"/>
+          <p:cNvPr id="14" name="TextBox 13"/>
           <p:cNvSpPr txBox="1"/>
           <p:nvPr/>
         </p:nvSpPr>
@@ -8684,7 +9648,7 @@
         <p:spPr>
           <a:xfrm>
             <a:off x="914400" y="4754880"/>
-            <a:ext cx="10332720" cy="731520"/>
+            <a:ext cx="10332720" cy="548640"/>
           </a:xfrm>
           <a:prstGeom prst="rect">
             <a:avLst/>
@@ -8718,6 +9682,41 @@
         </p:nvSpPr>
         <p:spPr>
           <a:xfrm>
+            <a:off x="914400" y="5349240"/>
+            <a:ext cx="10332720" cy="548640"/>
+          </a:xfrm>
+          <a:prstGeom prst="rect">
+            <a:avLst/>
+          </a:prstGeom>
+          <a:noFill/>
+        </p:spPr>
+        <p:txBody>
+          <a:bodyPr wrap="square" anchor="ctr">
+            <a:spAutoFit/>
+          </a:bodyPr>
+          <a:lstStyle/>
+          <a:p>
+            <a:pPr algn="ctr"/>
+            <a:r>
+              <a:rPr sz="1800" b="1" i="0">
+                <a:solidFill>
+                  <a:srgbClr val="E8EAED"/>
+                </a:solidFill>
+                <a:latin typeface="Segoe UI"/>
+              </a:rPr>
+              <a:t>Not a curated demo dataset.</a:t>
+            </a:r>
+          </a:p>
+        </p:txBody>
+      </p:sp>
+      <p:sp>
+        <p:nvSpPr>
+          <p:cNvPr id="8" name="TextBox 7"/>
+          <p:cNvSpPr txBox="1"/>
+          <p:nvPr/>
+        </p:nvSpPr>
+        <p:spPr>
+          <a:xfrm>
             <a:off x="457200" y="6446520"/>
             <a:ext cx="9875520" cy="320040"/>
           </a:xfrm>
@@ -8746,7 +9745,7 @@
       </p:sp>
       <p:sp>
         <p:nvSpPr>
-          <p:cNvPr id="8" name="TextBox 7"/>
+          <p:cNvPr id="9" name="TextBox 8"/>
           <p:cNvSpPr txBox="1"/>
           <p:nvPr/>
         </p:nvSpPr>
@@ -8834,7 +9833,7 @@
                 </a:solidFill>
                 <a:latin typeface="Segoe UI"/>
               </a:rPr>
-              <a:t>Engineering: bugs found and fixed, not just claimed</a:t>
+              <a:t>Production issues discovered using live municipal data</a:t>
             </a:r>
           </a:p>
         </p:txBody>
